--- a/Training Materials/20. Enterprise Data Engineering in JavaScript/Slides/03_The_Reactive_Data_Pipeline.pptx
+++ b/Training Materials/20. Enterprise Data Engineering in JavaScript/Slides/03_The_Reactive_Data_Pipeline.pptx
@@ -2133,10 +2133,10 @@
         <a:lstStyle/>
         <a:p>
           <a:r>
-            <a:rPr lang="en-IN"/>
+            <a:rPr lang="en-IN" dirty="0"/>
             <a:t>The Scenario: Expensive calculations (e.g., Black-Scholes Options Pricing).</a:t>
           </a:r>
-          <a:endParaRPr lang="en-US"/>
+          <a:endParaRPr lang="en-US" dirty="0"/>
         </a:p>
       </dgm:t>
     </dgm:pt>
@@ -3341,10 +3341,10 @@
             <a:buNone/>
           </a:pPr>
           <a:r>
-            <a:rPr lang="en-IN" sz="3100" kern="1200"/>
+            <a:rPr lang="en-IN" sz="3100" kern="1200" dirty="0"/>
             <a:t>The Scenario: Expensive calculations (e.g., Black-Scholes Options Pricing).</a:t>
           </a:r>
-          <a:endParaRPr lang="en-US" sz="3100" kern="1200"/>
+          <a:endParaRPr lang="en-US" sz="3100" kern="1200" dirty="0"/>
         </a:p>
       </dsp:txBody>
       <dsp:txXfrm>
@@ -7613,7 +7613,7 @@
           <a:p>
             <a:fld id="{4997B646-E19B-4900-B6F7-BBCF4CA123A8}" type="datetimeFigureOut">
               <a:rPr lang="en-IN" smtClean="0"/>
-              <a:t>11-02-2026</a:t>
+              <a:t>12-02-2026</a:t>
             </a:fld>
             <a:endParaRPr lang="en-IN"/>
           </a:p>
@@ -8682,7 +8682,7 @@
           <a:p>
             <a:fld id="{A3184F25-93CA-4083-91F6-44CD5E538C60}" type="datetime1">
               <a:rPr lang="en-IN" smtClean="0"/>
-              <a:t>11-02-2026</a:t>
+              <a:t>12-02-2026</a:t>
             </a:fld>
             <a:endParaRPr lang="en-IN"/>
           </a:p>
@@ -8933,7 +8933,7 @@
           <a:p>
             <a:fld id="{E9CB7436-2F6D-4A54-BB5F-1B1A7D5F97C6}" type="datetime1">
               <a:rPr lang="en-IN" smtClean="0"/>
-              <a:t>11-02-2026</a:t>
+              <a:t>12-02-2026</a:t>
             </a:fld>
             <a:endParaRPr lang="en-IN"/>
           </a:p>
@@ -9247,7 +9247,7 @@
           <a:p>
             <a:fld id="{80742C07-5C92-4389-910E-83425E69B4D2}" type="datetime1">
               <a:rPr lang="en-IN" smtClean="0"/>
-              <a:t>11-02-2026</a:t>
+              <a:t>12-02-2026</a:t>
             </a:fld>
             <a:endParaRPr lang="en-IN"/>
           </a:p>
@@ -9580,7 +9580,7 @@
           <a:p>
             <a:fld id="{CBBF8045-3960-47D5-8923-156FD8E34DC8}" type="datetime1">
               <a:rPr lang="en-IN" smtClean="0"/>
-              <a:t>11-02-2026</a:t>
+              <a:t>12-02-2026</a:t>
             </a:fld>
             <a:endParaRPr lang="en-IN"/>
           </a:p>
@@ -9894,7 +9894,7 @@
           <a:p>
             <a:fld id="{5BC44393-8762-49EE-A09D-C6718B772424}" type="datetime1">
               <a:rPr lang="en-IN" smtClean="0"/>
-              <a:t>11-02-2026</a:t>
+              <a:t>12-02-2026</a:t>
             </a:fld>
             <a:endParaRPr lang="en-IN"/>
           </a:p>
@@ -10287,7 +10287,7 @@
           <a:p>
             <a:fld id="{97DDA155-BABA-4042-AE3F-48DDD43C4338}" type="datetime1">
               <a:rPr lang="en-IN" smtClean="0"/>
-              <a:t>11-02-2026</a:t>
+              <a:t>12-02-2026</a:t>
             </a:fld>
             <a:endParaRPr lang="en-IN"/>
           </a:p>
@@ -10457,7 +10457,7 @@
           <a:p>
             <a:fld id="{94468DB0-FF17-4873-B285-6F3AA300A01E}" type="datetime1">
               <a:rPr lang="en-IN" smtClean="0"/>
-              <a:t>11-02-2026</a:t>
+              <a:t>12-02-2026</a:t>
             </a:fld>
             <a:endParaRPr lang="en-IN"/>
           </a:p>
@@ -10637,7 +10637,7 @@
           <a:p>
             <a:fld id="{64B2F982-93BC-4EAF-AD77-434B6A325E06}" type="datetime1">
               <a:rPr lang="en-IN" smtClean="0"/>
-              <a:t>11-02-2026</a:t>
+              <a:t>12-02-2026</a:t>
             </a:fld>
             <a:endParaRPr lang="en-IN"/>
           </a:p>
@@ -10807,7 +10807,7 @@
           <a:p>
             <a:fld id="{705952D2-2ACB-4F04-961A-2002AF374DCD}" type="datetime1">
               <a:rPr lang="en-IN" smtClean="0"/>
-              <a:t>11-02-2026</a:t>
+              <a:t>12-02-2026</a:t>
             </a:fld>
             <a:endParaRPr lang="en-IN"/>
           </a:p>
@@ -11054,7 +11054,7 @@
           <a:p>
             <a:fld id="{2480A2B5-705A-4377-AD51-0E64CB165C50}" type="datetime1">
               <a:rPr lang="en-IN" smtClean="0"/>
-              <a:t>11-02-2026</a:t>
+              <a:t>12-02-2026</a:t>
             </a:fld>
             <a:endParaRPr lang="en-IN"/>
           </a:p>
@@ -11286,7 +11286,7 @@
           <a:p>
             <a:fld id="{A4D52884-E373-49C8-9271-98304C4E9A78}" type="datetime1">
               <a:rPr lang="en-IN" smtClean="0"/>
-              <a:t>11-02-2026</a:t>
+              <a:t>12-02-2026</a:t>
             </a:fld>
             <a:endParaRPr lang="en-IN"/>
           </a:p>
@@ -11660,7 +11660,7 @@
           <a:p>
             <a:fld id="{2E056A54-3F66-4E14-AEB4-09A5EE83B80D}" type="datetime1">
               <a:rPr lang="en-IN" smtClean="0"/>
-              <a:t>11-02-2026</a:t>
+              <a:t>12-02-2026</a:t>
             </a:fld>
             <a:endParaRPr lang="en-IN"/>
           </a:p>
@@ -11783,7 +11783,7 @@
           <a:p>
             <a:fld id="{7AD91D8D-9340-4A58-BBB0-1FC1A260ABBC}" type="datetime1">
               <a:rPr lang="en-IN" smtClean="0"/>
-              <a:t>11-02-2026</a:t>
+              <a:t>12-02-2026</a:t>
             </a:fld>
             <a:endParaRPr lang="en-IN"/>
           </a:p>
@@ -11878,7 +11878,7 @@
           <a:p>
             <a:fld id="{37358AD7-9BCA-4D05-BAE8-D726A2DDC3A2}" type="datetime1">
               <a:rPr lang="en-IN" smtClean="0"/>
-              <a:t>11-02-2026</a:t>
+              <a:t>12-02-2026</a:t>
             </a:fld>
             <a:endParaRPr lang="en-IN"/>
           </a:p>
@@ -12133,7 +12133,7 @@
           <a:p>
             <a:fld id="{C3135B08-9571-416C-8DEA-0FD1B2A7F3C3}" type="datetime1">
               <a:rPr lang="en-IN" smtClean="0"/>
-              <a:t>11-02-2026</a:t>
+              <a:t>12-02-2026</a:t>
             </a:fld>
             <a:endParaRPr lang="en-IN"/>
           </a:p>
@@ -12438,7 +12438,7 @@
           <a:p>
             <a:fld id="{90417D46-0F71-4BCA-B6A1-0FCBBD18435F}" type="datetime1">
               <a:rPr lang="en-IN" smtClean="0"/>
-              <a:t>11-02-2026</a:t>
+              <a:t>12-02-2026</a:t>
             </a:fld>
             <a:endParaRPr lang="en-IN"/>
           </a:p>
@@ -13196,7 +13196,7 @@
           <a:p>
             <a:fld id="{14BA09EB-E0D8-48BA-B146-187B10F18B5C}" type="datetime1">
               <a:rPr lang="en-IN" smtClean="0"/>
-              <a:t>11-02-2026</a:t>
+              <a:t>12-02-2026</a:t>
             </a:fld>
             <a:endParaRPr lang="en-IN"/>
           </a:p>
@@ -13752,31 +13752,6 @@
               <a:rPr lang="en-IN" dirty="0"/>
               <a:t>Reactive State &amp; Performance Optimization</a:t>
             </a:r>
-          </a:p>
-        </p:txBody>
-      </p:sp>
-      <p:sp>
-        <p:nvSpPr>
-          <p:cNvPr id="3" name="Subtitle 2">
-            <a:extLst>
-              <a:ext uri="{FF2B5EF4-FFF2-40B4-BE49-F238E27FC236}">
-                <a16:creationId xmlns:a16="http://schemas.microsoft.com/office/drawing/2014/main" id="{81FD4AB7-419E-685E-1C4B-08FA870C0CDB}"/>
-              </a:ext>
-            </a:extLst>
-          </p:cNvPr>
-          <p:cNvSpPr>
-            <a:spLocks noGrp="1"/>
-          </p:cNvSpPr>
-          <p:nvPr>
-            <p:ph type="subTitle" idx="1"/>
-          </p:nvPr>
-        </p:nvSpPr>
-        <p:spPr/>
-        <p:txBody>
-          <a:bodyPr/>
-          <a:lstStyle/>
-          <a:p>
-            <a:endParaRPr lang="en-IN" dirty="0"/>
           </a:p>
         </p:txBody>
       </p:sp>
@@ -18744,14 +18719,24 @@
                         <a:buNone/>
                       </a:pPr>
                       <a:r>
-                        <a:rPr lang="en-IN" sz="1900" cap="none" spc="0">
+                        <a:rPr lang="en-IN" sz="1900" cap="none" spc="0" dirty="0" err="1">
                           <a:solidFill>
                             <a:schemeClr val="tx1"/>
                           </a:solidFill>
                           <a:effectLst/>
                           <a:latin typeface="Google Sans Text"/>
                         </a:rPr>
-                        <a:t>const cache = new Map()</a:t>
+                        <a:t>const</a:t>
+                      </a:r>
+                      <a:r>
+                        <a:rPr lang="en-IN" sz="1900" cap="none" spc="0" dirty="0">
+                          <a:solidFill>
+                            <a:schemeClr val="tx1"/>
+                          </a:solidFill>
+                          <a:effectLst/>
+                          <a:latin typeface="Google Sans Text"/>
+                        </a:rPr>
+                        <a:t> cache = new Map()</a:t>
                       </a:r>
                     </a:p>
                   </a:txBody>
@@ -19341,14 +19326,24 @@
                         <a:buNone/>
                       </a:pPr>
                       <a:r>
-                        <a:rPr lang="en-IN" sz="1900" cap="none" spc="0">
+                        <a:rPr lang="en-IN" sz="1900" cap="none" spc="0" dirty="0" err="1">
                           <a:solidFill>
                             <a:schemeClr val="tx1"/>
                           </a:solidFill>
                           <a:effectLst/>
                           <a:latin typeface="Google Sans Text"/>
                         </a:rPr>
-                        <a:t>cache.get(key)</a:t>
+                        <a:t>cache.get</a:t>
+                      </a:r>
+                      <a:r>
+                        <a:rPr lang="en-IN" sz="1900" cap="none" spc="0" dirty="0">
+                          <a:solidFill>
+                            <a:schemeClr val="tx1"/>
+                          </a:solidFill>
+                          <a:effectLst/>
+                          <a:latin typeface="Google Sans Text"/>
+                        </a:rPr>
+                        <a:t>(key)</a:t>
                       </a:r>
                     </a:p>
                   </a:txBody>
@@ -19436,7 +19431,7 @@
                         <a:buNone/>
                       </a:pPr>
                       <a:r>
-                        <a:rPr lang="en-US" sz="1900" b="1" cap="none" spc="0">
+                        <a:rPr lang="en-US" sz="1900" b="1" cap="none" spc="0" dirty="0">
                           <a:solidFill>
                             <a:schemeClr val="tx1"/>
                           </a:solidFill>
@@ -19446,7 +19441,7 @@
                         <a:t>Closure</a:t>
                       </a:r>
                       <a:r>
-                        <a:rPr lang="en-US" sz="1900" cap="none" spc="0">
+                        <a:rPr lang="en-US" sz="1900" cap="none" spc="0" dirty="0">
                           <a:solidFill>
                             <a:schemeClr val="tx1"/>
                           </a:solidFill>
